--- a/public/fun/pack/pptx/weddingpro/결혼식프리미엄_27_러브스토리중심_코퍼차콜.pptx
+++ b/public/fun/pack/pptx/weddingpro/결혼식프리미엄_27_러브스토리중심_코퍼차콜.pptx
@@ -113,12 +113,12 @@
   <p:extLst>
     <p:ext uri="{521415D9-36F7-43E2-AB2F-B90AF26B5E84}">
       <p14:sectionLst xmlns:p14="http://schemas.microsoft.com/office/powerpoint/2010/main">
-        <p14:section name="시작" id="{1B7369E6-5231-49D1-B41A-63C53B953015}">
+        <p14:section name="시작" id="{A54892B3-AD0C-4E45-8FA8-E96D4A409104}">
           <p14:sldIdLst>
             <p14:sldId id="256"/>
           </p14:sldIdLst>
         </p14:section>
-        <p14:section name="본문" id="{B1BFAFA7-9021-4DE5-B123-8D382388576C}">
+        <p14:section name="본문" id="{62FCCEDF-628B-468D-9C2A-0F159D2869E0}">
           <p14:sldIdLst>
             <p14:sldId id="257"/>
             <p14:sldId id="258"/>
@@ -127,7 +127,7 @@
             <p14:sldId id="261"/>
           </p14:sldIdLst>
         </p14:section>
-        <p14:section name="마무리" id="{283997B8-FE4F-43BB-9FA7-3639DD9EA2F3}">
+        <p14:section name="마무리" id="{8CA5749E-9C50-46EE-8CBA-92D1B50F3544}">
           <p14:sldIdLst>
             <p14:sldId id="262"/>
           </p14:sldIdLst>
@@ -1574,7 +1574,7 @@
             </a:lvl1pPr>
           </a:lstStyle>
           <a:p>
-            <a:fld id="{BC3BA615-F039-440E-9088-445D3373AE7D}" type="slidenum">
+            <a:fld id="{75AECD85-F3D2-407D-A95B-A5E6CB43147F}" type="slidenum">
               <a:rPr lang="en-US"/>
               <a:t>‹#›</a:t>
             </a:fld>
@@ -2208,7 +2208,7 @@
             </a:lvl1pPr>
           </a:lstStyle>
           <a:p>
-            <a:fld id="{E72EBCF9-7EF1-4F5B-9A28-738B73495F16}" type="slidenum">
+            <a:fld id="{72836222-1687-4065-82F9-5E7D2CDF7063}" type="slidenum">
               <a:rPr lang="en-US"/>
               <a:t>‹#›</a:t>
             </a:fld>
@@ -2805,7 +2805,7 @@
             </a:lvl1pPr>
           </a:lstStyle>
           <a:p>
-            <a:fld id="{9CCB8028-F06B-4D83-B557-75818105EB4E}" type="slidenum">
+            <a:fld id="{CAC712F3-D2D0-4CE2-BFAF-7E998762CD55}" type="slidenum">
               <a:rPr lang="en-US"/>
               <a:t>‹#›</a:t>
             </a:fld>
@@ -3614,7 +3614,7 @@
           <a:p>
             <a:r>
               <a:rPr lang="ko-KR"/>
-              <a:t>0000. 00. 00 · 예식장 이름</a:t>
+              <a:t>날짜 입력 · 예식장 이름</a:t>
             </a:r>
           </a:p>
         </p:txBody>
@@ -3835,7 +3835,7 @@
           <a:bodyPr/>
           <a:lstStyle/>
           <a:p>
-            <a:fld id="{A3AA9C90-42E7-4AEC-BC4D-79AA1E35C6C8}" type="slidenum">
+            <a:fld id="{1E3650BA-6FDC-4CDD-9A21-7B961F083C5A}" type="slidenum">
               <a:rPr lang="en-US"/>
               <a:t>‹#›</a:t>
             </a:fld>
@@ -4231,7 +4231,7 @@
           <a:bodyPr/>
           <a:lstStyle/>
           <a:p>
-            <a:fld id="{4D769F4E-A719-48AB-8A26-2B055B94EF90}" type="slidenum">
+            <a:fld id="{CE19DDFE-287C-4DE1-954E-BBD9D23D4E29}" type="slidenum">
               <a:rPr lang="en-US"/>
               <a:t>‹#›</a:t>
             </a:fld>
@@ -5073,7 +5073,7 @@
           <a:bodyPr/>
           <a:lstStyle/>
           <a:p>
-            <a:fld id="{AE0A5F7F-3F6A-4A59-A999-0A052115CE0C}" type="slidenum">
+            <a:fld id="{88EE430B-2F7D-43F1-AC13-D81C9845D46C}" type="slidenum">
               <a:rPr lang="en-US"/>
               <a:t>‹#›</a:t>
             </a:fld>
@@ -6645,7 +6645,7 @@
           <a:bodyPr/>
           <a:lstStyle/>
           <a:p>
-            <a:fld id="{BE1F2CB4-70B1-4E02-B94A-C642AD7DDBF9}" type="slidenum">
+            <a:fld id="{C8318720-538A-4CB7-8683-3753F39983B7}" type="slidenum">
               <a:rPr lang="en-US"/>
               <a:t>‹#›</a:t>
             </a:fld>
@@ -6733,7 +6733,7 @@
           <a:bodyPr/>
           <a:lstStyle/>
           <a:p>
-            <a:fld id="{B01DEF17-E4A5-454E-A6D0-6454B91999B9}" type="slidenum">
+            <a:fld id="{2ECE17CA-09F4-4304-8B29-B7CC9409B72E}" type="slidenum">
               <a:rPr lang="en-US"/>
               <a:t>‹#›</a:t>
             </a:fld>
